--- a/diagrams/aug/errors/gpt_oss.pptx
+++ b/diagrams/aug/errors/gpt_oss.pptx
@@ -243,7 +243,7 @@
           <a:p>
             <a:fld id="{53FBDB0D-4B9C-498E-9619-33EBE6CBBBDD}" type="datetimeFigureOut">
               <a:rPr lang="en-IN" smtClean="0"/>
-              <a:t>31-07-2026</a:t>
+              <a:t>01-08-2026</a:t>
             </a:fld>
             <a:endParaRPr lang="en-IN"/>
           </a:p>
@@ -413,7 +413,7 @@
           <a:p>
             <a:fld id="{53FBDB0D-4B9C-498E-9619-33EBE6CBBBDD}" type="datetimeFigureOut">
               <a:rPr lang="en-IN" smtClean="0"/>
-              <a:t>31-07-2026</a:t>
+              <a:t>01-08-2026</a:t>
             </a:fld>
             <a:endParaRPr lang="en-IN"/>
           </a:p>
@@ -593,7 +593,7 @@
           <a:p>
             <a:fld id="{53FBDB0D-4B9C-498E-9619-33EBE6CBBBDD}" type="datetimeFigureOut">
               <a:rPr lang="en-IN" smtClean="0"/>
-              <a:t>31-07-2026</a:t>
+              <a:t>01-08-2026</a:t>
             </a:fld>
             <a:endParaRPr lang="en-IN"/>
           </a:p>
@@ -763,7 +763,7 @@
           <a:p>
             <a:fld id="{53FBDB0D-4B9C-498E-9619-33EBE6CBBBDD}" type="datetimeFigureOut">
               <a:rPr lang="en-IN" smtClean="0"/>
-              <a:t>31-07-2026</a:t>
+              <a:t>01-08-2026</a:t>
             </a:fld>
             <a:endParaRPr lang="en-IN"/>
           </a:p>
@@ -1007,7 +1007,7 @@
           <a:p>
             <a:fld id="{53FBDB0D-4B9C-498E-9619-33EBE6CBBBDD}" type="datetimeFigureOut">
               <a:rPr lang="en-IN" smtClean="0"/>
-              <a:t>31-07-2026</a:t>
+              <a:t>01-08-2026</a:t>
             </a:fld>
             <a:endParaRPr lang="en-IN"/>
           </a:p>
@@ -1239,7 +1239,7 @@
           <a:p>
             <a:fld id="{53FBDB0D-4B9C-498E-9619-33EBE6CBBBDD}" type="datetimeFigureOut">
               <a:rPr lang="en-IN" smtClean="0"/>
-              <a:t>31-07-2026</a:t>
+              <a:t>01-08-2026</a:t>
             </a:fld>
             <a:endParaRPr lang="en-IN"/>
           </a:p>
@@ -1606,7 +1606,7 @@
           <a:p>
             <a:fld id="{53FBDB0D-4B9C-498E-9619-33EBE6CBBBDD}" type="datetimeFigureOut">
               <a:rPr lang="en-IN" smtClean="0"/>
-              <a:t>31-07-2026</a:t>
+              <a:t>01-08-2026</a:t>
             </a:fld>
             <a:endParaRPr lang="en-IN"/>
           </a:p>
@@ -1724,7 +1724,7 @@
           <a:p>
             <a:fld id="{53FBDB0D-4B9C-498E-9619-33EBE6CBBBDD}" type="datetimeFigureOut">
               <a:rPr lang="en-IN" smtClean="0"/>
-              <a:t>31-07-2026</a:t>
+              <a:t>01-08-2026</a:t>
             </a:fld>
             <a:endParaRPr lang="en-IN"/>
           </a:p>
@@ -1819,7 +1819,7 @@
           <a:p>
             <a:fld id="{53FBDB0D-4B9C-498E-9619-33EBE6CBBBDD}" type="datetimeFigureOut">
               <a:rPr lang="en-IN" smtClean="0"/>
-              <a:t>31-07-2026</a:t>
+              <a:t>01-08-2026</a:t>
             </a:fld>
             <a:endParaRPr lang="en-IN"/>
           </a:p>
@@ -2096,7 +2096,7 @@
           <a:p>
             <a:fld id="{53FBDB0D-4B9C-498E-9619-33EBE6CBBBDD}" type="datetimeFigureOut">
               <a:rPr lang="en-IN" smtClean="0"/>
-              <a:t>31-07-2026</a:t>
+              <a:t>01-08-2026</a:t>
             </a:fld>
             <a:endParaRPr lang="en-IN"/>
           </a:p>
@@ -2353,7 +2353,7 @@
           <a:p>
             <a:fld id="{53FBDB0D-4B9C-498E-9619-33EBE6CBBBDD}" type="datetimeFigureOut">
               <a:rPr lang="en-IN" smtClean="0"/>
-              <a:t>31-07-2026</a:t>
+              <a:t>01-08-2026</a:t>
             </a:fld>
             <a:endParaRPr lang="en-IN"/>
           </a:p>
@@ -2566,7 +2566,7 @@
           <a:p>
             <a:fld id="{53FBDB0D-4B9C-498E-9619-33EBE6CBBBDD}" type="datetimeFigureOut">
               <a:rPr lang="en-IN" smtClean="0"/>
-              <a:t>31-07-2026</a:t>
+              <a:t>01-08-2026</a:t>
             </a:fld>
             <a:endParaRPr lang="en-IN"/>
           </a:p>
@@ -2973,88 +2973,89 @@
       </p:grpSpPr>
       <p:graphicFrame>
         <p:nvGraphicFramePr>
-          <p:cNvPr id="6" name="Table 5"/>
+          <p:cNvPr id="3" name="Table 2">
+            <a:extLst>
+              <a:ext uri="{FF2B5EF4-FFF2-40B4-BE49-F238E27FC236}">
+                <a16:creationId xmlns:a16="http://schemas.microsoft.com/office/drawing/2014/main" xmlns="" id="{7B539D08-B13C-6385-A8C8-72B746C83124}"/>
+              </a:ext>
+            </a:extLst>
+          </p:cNvPr>
           <p:cNvGraphicFramePr>
             <a:graphicFrameLocks noGrp="1"/>
           </p:cNvGraphicFramePr>
           <p:nvPr>
             <p:extLst>
               <p:ext uri="{D42A27DB-BD31-4B8C-83A1-F6EECF244321}">
-                <p14:modId xmlns:p14="http://schemas.microsoft.com/office/powerpoint/2010/main" val="3118555168"/>
+                <p14:modId xmlns:p14="http://schemas.microsoft.com/office/powerpoint/2010/main" val="3957031552"/>
               </p:ext>
             </p:extLst>
           </p:nvPr>
         </p:nvGraphicFramePr>
         <p:xfrm>
-          <a:off x="318743" y="2131177"/>
-          <a:ext cx="6220513" cy="5830924"/>
+          <a:off x="138794" y="1445468"/>
+          <a:ext cx="6580412" cy="3998102"/>
         </p:xfrm>
         <a:graphic>
           <a:graphicData uri="http://schemas.openxmlformats.org/drawingml/2006/table">
             <a:tbl>
               <a:tblPr firstRow="1" bandRow="1">
-                <a:tableStyleId>{D7AC3CCA-C797-4891-BE02-D94E43425B78}</a:tableStyleId>
+                <a:tableStyleId>{93296810-A885-4BE3-A3E7-6D5BEEA58F35}</a:tableStyleId>
               </a:tblPr>
               <a:tblGrid>
-                <a:gridCol w="633757">
+                <a:gridCol w="636811">
                   <a:extLst>
                     <a:ext uri="{9D8B030D-6E8A-4147-A177-3AD203B41FA5}">
-                      <a16:colId xmlns="" xmlns:a16="http://schemas.microsoft.com/office/drawing/2014/main" val="20000"/>
+                      <a16:colId xmlns:a16="http://schemas.microsoft.com/office/drawing/2014/main" xmlns="" val="20000"/>
                     </a:ext>
                   </a:extLst>
                 </a:gridCol>
-                <a:gridCol w="635539"/>
-                <a:gridCol w="1257346">
+                <a:gridCol w="1755324">
                   <a:extLst>
                     <a:ext uri="{9D8B030D-6E8A-4147-A177-3AD203B41FA5}">
-                      <a16:colId xmlns="" xmlns:a16="http://schemas.microsoft.com/office/drawing/2014/main" val="20001"/>
+                      <a16:colId xmlns:a16="http://schemas.microsoft.com/office/drawing/2014/main" xmlns="" val="20001"/>
                     </a:ext>
                   </a:extLst>
                 </a:gridCol>
-                <a:gridCol w="1533876">
+                <a:gridCol w="2090057">
                   <a:extLst>
                     <a:ext uri="{9D8B030D-6E8A-4147-A177-3AD203B41FA5}">
-                      <a16:colId xmlns="" xmlns:a16="http://schemas.microsoft.com/office/drawing/2014/main" val="20002"/>
+                      <a16:colId xmlns:a16="http://schemas.microsoft.com/office/drawing/2014/main" xmlns="" val="20002"/>
                     </a:ext>
                   </a:extLst>
                 </a:gridCol>
-                <a:gridCol w="2159995">
+                <a:gridCol w="2098220">
                   <a:extLst>
                     <a:ext uri="{9D8B030D-6E8A-4147-A177-3AD203B41FA5}">
-                      <a16:colId xmlns="" xmlns:a16="http://schemas.microsoft.com/office/drawing/2014/main" val="20003"/>
+                      <a16:colId xmlns:a16="http://schemas.microsoft.com/office/drawing/2014/main" xmlns="" val="20003"/>
                     </a:ext>
                   </a:extLst>
                 </a:gridCol>
               </a:tblGrid>
-              <a:tr h="267855">
+              <a:tr h="515307">
                 <a:tc>
                   <a:txBody>
                     <a:bodyPr/>
                     <a:lstStyle/>
                     <a:p>
                       <a:r>
-                        <a:rPr lang="en-US" sz="1200" b="0" dirty="0">
+                        <a:rPr lang="en-US" sz="1100" b="1" dirty="0">
                           <a:solidFill>
                             <a:schemeClr val="bg1"/>
                           </a:solidFill>
-                          <a:latin typeface="+mn-lt"/>
-                          <a:cs typeface="Times New Roman" panose="02020603050405020304" pitchFamily="18" charset="0"/>
                         </a:rPr>
                         <a:t>Error </a:t>
                       </a:r>
                     </a:p>
                     <a:p>
                       <a:r>
-                        <a:rPr lang="en-US" sz="1200" b="0" dirty="0">
+                        <a:rPr lang="en-US" sz="1100" b="1" dirty="0">
                           <a:solidFill>
                             <a:schemeClr val="bg1"/>
                           </a:solidFill>
-                          <a:latin typeface="+mn-lt"/>
-                          <a:cs typeface="Times New Roman" panose="02020603050405020304" pitchFamily="18" charset="0"/>
                         </a:rPr>
                         <a:t>Type</a:t>
                       </a:r>
-                      <a:endParaRPr lang="en-GB" sz="1200" b="0" dirty="0">
+                      <a:endParaRPr lang="en-GB" sz="1100" b="1" dirty="0">
                         <a:solidFill>
                           <a:schemeClr val="bg1"/>
                         </a:solidFill>
@@ -3063,11 +3064,7 @@
                       </a:endParaRPr>
                     </a:p>
                   </a:txBody>
-                  <a:tcPr marT="45721" marB="45721">
-                    <a:solidFill>
-                      <a:schemeClr val="accent1"/>
-                    </a:solidFill>
-                  </a:tcPr>
+                  <a:tcPr marT="45721" marB="45721"/>
                 </a:tc>
                 <a:tc>
                   <a:txBody>
@@ -3075,42 +3072,10 @@
                     <a:lstStyle/>
                     <a:p>
                       <a:r>
-                        <a:rPr lang="en-GB" sz="1200" b="0" dirty="0" smtClean="0">
+                        <a:rPr lang="en-US" sz="1100" b="1" dirty="0">
                           <a:solidFill>
                             <a:schemeClr val="bg1"/>
                           </a:solidFill>
-                          <a:latin typeface="+mn-lt"/>
-                          <a:cs typeface="Times New Roman" panose="02020603050405020304" pitchFamily="18" charset="0"/>
-                        </a:rPr>
-                        <a:t>Model</a:t>
-                      </a:r>
-                      <a:endParaRPr lang="en-GB" sz="1200" b="0" dirty="0">
-                        <a:solidFill>
-                          <a:schemeClr val="bg1"/>
-                        </a:solidFill>
-                        <a:latin typeface="+mn-lt"/>
-                        <a:cs typeface="Times New Roman" panose="02020603050405020304" pitchFamily="18" charset="0"/>
-                      </a:endParaRPr>
-                    </a:p>
-                  </a:txBody>
-                  <a:tcPr marT="45721" marB="45721">
-                    <a:solidFill>
-                      <a:schemeClr val="accent1"/>
-                    </a:solidFill>
-                  </a:tcPr>
-                </a:tc>
-                <a:tc>
-                  <a:txBody>
-                    <a:bodyPr/>
-                    <a:lstStyle/>
-                    <a:p>
-                      <a:r>
-                        <a:rPr lang="en-US" sz="1200" b="0" dirty="0">
-                          <a:solidFill>
-                            <a:schemeClr val="bg1"/>
-                          </a:solidFill>
-                          <a:latin typeface="+mn-lt"/>
-                          <a:cs typeface="Times New Roman" panose="02020603050405020304" pitchFamily="18" charset="0"/>
                         </a:rPr>
                         <a:t>Source Language: Sanskrit</a:t>
                       </a:r>
@@ -3125,28 +3090,12 @@
                       </a:endParaRPr>
                     </a:p>
                   </a:txBody>
-                  <a:tcPr marT="45721" marB="45721">
-                    <a:solidFill>
-                      <a:schemeClr val="accent1"/>
-                    </a:solidFill>
-                  </a:tcPr>
+                  <a:tcPr marT="45721" marB="45721"/>
                 </a:tc>
                 <a:tc>
                   <a:txBody>
                     <a:bodyPr/>
                     <a:lstStyle/>
-                    <a:p>
-                      <a:r>
-                        <a:rPr lang="en-US" sz="1050" b="0" dirty="0">
-                          <a:solidFill>
-                            <a:schemeClr val="bg1"/>
-                          </a:solidFill>
-                          <a:latin typeface="+mn-lt"/>
-                          <a:cs typeface="Times New Roman" panose="02020603050405020304" pitchFamily="18" charset="0"/>
-                        </a:rPr>
-                        <a:t>Target Language:   Hindi</a:t>
-                      </a:r>
-                    </a:p>
                     <a:p>
                       <a:pPr marL="0" marR="0" lvl="0" indent="0" algn="l" defTabSz="685800" rtl="0" eaLnBrk="1" fontAlgn="auto" latinLnBrk="0" hangingPunct="1">
                         <a:lnSpc>
@@ -3166,14 +3115,22 @@
                         <a:defRPr/>
                       </a:pPr>
                       <a:r>
-                        <a:rPr lang="en-US" sz="1200" b="0" dirty="0">
+                        <a:rPr lang="en-US" sz="1100" b="1" dirty="0">
                           <a:solidFill>
                             <a:schemeClr val="bg1"/>
                           </a:solidFill>
-                          <a:latin typeface="+mn-lt"/>
-                          <a:cs typeface="Times New Roman" panose="02020603050405020304" pitchFamily="18" charset="0"/>
                         </a:rPr>
                         <a:t>LLM Hallucination</a:t>
+                      </a:r>
+                    </a:p>
+                    <a:p>
+                      <a:r>
+                        <a:rPr lang="en-US" sz="1100" b="1" dirty="0">
+                          <a:solidFill>
+                            <a:schemeClr val="bg1"/>
+                          </a:solidFill>
+                        </a:rPr>
+                        <a:t>Target Language:   Hindi</a:t>
                       </a:r>
                     </a:p>
                     <a:p>
@@ -3186,11 +3143,7 @@
                       </a:endParaRPr>
                     </a:p>
                   </a:txBody>
-                  <a:tcPr marT="45721" marB="45721">
-                    <a:solidFill>
-                      <a:schemeClr val="accent1"/>
-                    </a:solidFill>
-                  </a:tcPr>
+                  <a:tcPr marT="45721" marB="45721"/>
                 </a:tc>
                 <a:tc>
                   <a:txBody>
@@ -3198,16 +3151,14 @@
                     <a:lstStyle/>
                     <a:p>
                       <a:r>
-                        <a:rPr lang="en-US" sz="1200" b="0" dirty="0">
+                        <a:rPr lang="en-US" sz="1100" b="1" dirty="0">
                           <a:solidFill>
                             <a:schemeClr val="bg1"/>
                           </a:solidFill>
-                          <a:latin typeface="+mn-lt"/>
-                          <a:cs typeface="Times New Roman" panose="02020603050405020304" pitchFamily="18" charset="0"/>
                         </a:rPr>
                         <a:t>Explanation</a:t>
                       </a:r>
-                      <a:endParaRPr lang="en-GB" sz="1200" b="0" dirty="0">
+                      <a:endParaRPr lang="en-GB" sz="1100" b="1" dirty="0">
                         <a:solidFill>
                           <a:schemeClr val="bg1"/>
                         </a:solidFill>
@@ -3216,45 +3167,31 @@
                       </a:endParaRPr>
                     </a:p>
                   </a:txBody>
-                  <a:tcPr marT="45721" marB="45721">
-                    <a:solidFill>
-                      <a:schemeClr val="accent1"/>
-                    </a:solidFill>
-                  </a:tcPr>
+                  <a:tcPr marT="45721" marB="45721"/>
                 </a:tc>
                 <a:extLst>
                   <a:ext uri="{0D108BD9-81ED-4DB2-BD59-A6C34878D82A}">
-                    <a16:rowId xmlns="" xmlns:a16="http://schemas.microsoft.com/office/drawing/2014/main" val="10000"/>
+                    <a16:rowId xmlns:a16="http://schemas.microsoft.com/office/drawing/2014/main" xmlns="" val="10000"/>
                   </a:ext>
                 </a:extLst>
               </a:tr>
-              <a:tr h="801251">
+              <a:tr h="508615">
                 <a:tc>
                   <a:txBody>
                     <a:bodyPr/>
                     <a:lstStyle/>
                     <a:p>
                       <a:r>
-                        <a:rPr lang="en-US" sz="900" b="1" dirty="0">
-                          <a:latin typeface="+mn-lt"/>
-                          <a:cs typeface="Times New Roman" panose="02020603050405020304" pitchFamily="18" charset="0"/>
-                        </a:rPr>
+                        <a:rPr lang="en-US" sz="700" b="1" dirty="0"/>
                         <a:t>Location</a:t>
                       </a:r>
-                      <a:endParaRPr lang="en-GB" sz="900" b="1" dirty="0">
+                      <a:endParaRPr lang="en-GB" sz="700" b="1" dirty="0">
                         <a:latin typeface="+mn-lt"/>
                         <a:cs typeface="Times New Roman" panose="02020603050405020304" pitchFamily="18" charset="0"/>
                       </a:endParaRPr>
                     </a:p>
                   </a:txBody>
-                  <a:tcPr marT="45721" marB="45721">
-                    <a:solidFill>
-                      <a:schemeClr val="accent1">
-                        <a:lumMod val="20000"/>
-                        <a:lumOff val="80000"/>
-                      </a:schemeClr>
-                    </a:solidFill>
-                  </a:tcPr>
+                  <a:tcPr marT="45721" marB="45721"/>
                 </a:tc>
                 <a:tc>
                   <a:txBody>
@@ -3262,26 +3199,44 @@
                     <a:lstStyle/>
                     <a:p>
                       <a:r>
-                        <a:rPr lang="en-GB" sz="900" b="1" dirty="0" smtClean="0">
-                          <a:latin typeface="+mn-lt"/>
-                          <a:cs typeface="Times New Roman" panose="02020603050405020304" pitchFamily="18" charset="0"/>
+                        <a:rPr lang="hi-IN" sz="700" b="0" kern="1200" dirty="0">
+                          <a:solidFill>
+                            <a:schemeClr val="dk1"/>
+                          </a:solidFill>
+                          <a:effectLst/>
                         </a:rPr>
-                        <a:t>GPT-OSS</a:t>
-                      </a:r>
-                      <a:endParaRPr lang="en-GB" sz="900" b="1" dirty="0">
+                        <a:t>यथा </a:t>
+                      </a:r>
+                      <a:r>
+                        <a:rPr lang="hi-IN" sz="700" b="0" kern="1200" dirty="0">
+                          <a:solidFill>
+                            <a:srgbClr val="FF0000"/>
+                          </a:solidFill>
+                          <a:effectLst/>
+                        </a:rPr>
+                        <a:t>ऐरोप्य-अमेरिकीय-सिनेमाक्षेत्रम्</a:t>
+                      </a:r>
+                      <a:r>
+                        <a:rPr lang="hi-IN" sz="700" b="0" kern="1200" dirty="0">
+                          <a:solidFill>
+                            <a:schemeClr val="dk1"/>
+                          </a:solidFill>
+                          <a:effectLst/>
+                        </a:rPr>
+                        <a:t>, एवमेव भारतीय-सिनेमाक्षेत्रस्य शताधिकवर्षाणां इतिहासः वर्तते।</a:t>
+                      </a:r>
+                      <a:endParaRPr lang="hi-IN" sz="700" b="0" kern="1200" dirty="0">
+                        <a:solidFill>
+                          <a:schemeClr val="dk1"/>
+                        </a:solidFill>
+                        <a:effectLst/>
                         <a:latin typeface="+mn-lt"/>
-                        <a:cs typeface="Times New Roman" panose="02020603050405020304" pitchFamily="18" charset="0"/>
+                        <a:ea typeface="+mn-ea"/>
+                        <a:cs typeface="+mn-cs"/>
                       </a:endParaRPr>
                     </a:p>
                   </a:txBody>
-                  <a:tcPr marT="45721" marB="45721">
-                    <a:solidFill>
-                      <a:schemeClr val="accent1">
-                        <a:lumMod val="20000"/>
-                        <a:lumOff val="80000"/>
-                      </a:schemeClr>
-                    </a:solidFill>
-                  </a:tcPr>
+                  <a:tcPr marT="45721" marB="45721"/>
                 </a:tc>
                 <a:tc>
                   <a:txBody>
@@ -3289,51 +3244,44 @@
                     <a:lstStyle/>
                     <a:p>
                       <a:r>
-                        <a:rPr lang="hi-IN" sz="900" b="0" kern="1200" dirty="0">
+                        <a:rPr lang="hi-IN" sz="700" b="0" kern="1200" dirty="0">
                           <a:solidFill>
                             <a:schemeClr val="dk1"/>
                           </a:solidFill>
                           <a:effectLst/>
-                          <a:latin typeface="+mn-lt"/>
-                          <a:ea typeface="+mn-ea"/>
-                          <a:cs typeface="+mn-cs"/>
                         </a:rPr>
-                        <a:t>ह.. ह.. इदं न </a:t>
-                      </a:r>
-                      <a:r>
-                        <a:rPr lang="hi-IN" sz="900" b="0" kern="1200" dirty="0">
+                        <a:t>जैसे </a:t>
+                      </a:r>
+                      <a:r>
+                        <a:rPr lang="hi-IN" sz="700" b="0" kern="1200" dirty="0">
                           <a:solidFill>
                             <a:srgbClr val="FF0000"/>
                           </a:solidFill>
                           <a:effectLst/>
-                          <a:latin typeface="+mn-lt"/>
-                          <a:ea typeface="+mn-ea"/>
-                          <a:cs typeface="+mn-cs"/>
                         </a:rPr>
-                        <a:t>गुर्गांव् नगरम्</a:t>
-                      </a:r>
-                      <a:r>
-                        <a:rPr lang="hi-IN" sz="900" b="0" kern="1200" dirty="0">
+                        <a:t>अमेरिका का सिनेमा क्षेत्र </a:t>
+                      </a:r>
+                      <a:r>
+                        <a:rPr lang="hi-IN" sz="700" b="0" kern="1200" dirty="0">
                           <a:solidFill>
                             <a:schemeClr val="dk1"/>
                           </a:solidFill>
                           <a:effectLst/>
-                          <a:latin typeface="+mn-lt"/>
-                          <a:ea typeface="+mn-ea"/>
-                          <a:cs typeface="+mn-cs"/>
                         </a:rPr>
-                        <a:t>।</a:t>
-                      </a:r>
+                        <a:t>है, वैसे ही भारतीय सिनेमा क्षेत्र का सैकड़ों वर्षों का इतिहास है।</a:t>
+                      </a:r>
+                      <a:endParaRPr lang="hi-IN" sz="700" b="0" kern="1200" dirty="0">
+                        <a:solidFill>
+                          <a:schemeClr val="dk1"/>
+                        </a:solidFill>
+                        <a:effectLst/>
+                        <a:latin typeface="+mn-lt"/>
+                        <a:ea typeface="+mn-ea"/>
+                        <a:cs typeface="+mn-cs"/>
+                      </a:endParaRPr>
                     </a:p>
                   </a:txBody>
-                  <a:tcPr marT="45721" marB="45721">
-                    <a:solidFill>
-                      <a:schemeClr val="accent1">
-                        <a:lumMod val="20000"/>
-                        <a:lumOff val="80000"/>
-                      </a:schemeClr>
-                    </a:solidFill>
-                  </a:tcPr>
+                  <a:tcPr marT="45721" marB="45721"/>
                 </a:tc>
                 <a:tc>
                   <a:txBody>
@@ -3341,51 +3289,40 @@
                     <a:lstStyle/>
                     <a:p>
                       <a:r>
-                        <a:rPr lang="hi-IN" sz="900" b="0" kern="1200" dirty="0">
-                          <a:solidFill>
-                            <a:schemeClr val="dk1"/>
-                          </a:solidFill>
-                          <a:effectLst/>
-                          <a:latin typeface="+mn-lt"/>
-                          <a:ea typeface="+mn-ea"/>
-                          <a:cs typeface="+mn-cs"/>
-                        </a:rPr>
-                        <a:t>ह... ह... यह </a:t>
-                      </a:r>
-                      <a:r>
-                        <a:rPr lang="hi-IN" sz="900" b="0" kern="1200" dirty="0">
-                          <a:solidFill>
-                            <a:srgbClr val="FF0000"/>
-                          </a:solidFill>
-                          <a:effectLst/>
-                          <a:latin typeface="+mn-lt"/>
-                          <a:ea typeface="+mn-ea"/>
-                          <a:cs typeface="+mn-cs"/>
-                        </a:rPr>
-                        <a:t>गूर्जां नागर </a:t>
-                      </a:r>
-                      <a:r>
-                        <a:rPr lang="hi-IN" sz="900" b="0" kern="1200" dirty="0">
-                          <a:solidFill>
-                            <a:schemeClr val="dk1"/>
-                          </a:solidFill>
-                          <a:effectLst/>
-                          <a:latin typeface="+mn-lt"/>
-                          <a:ea typeface="+mn-ea"/>
-                          <a:cs typeface="+mn-cs"/>
-                        </a:rPr>
-                        <a:t>में अन्तरित नहीं है।</a:t>
-                      </a:r>
+                        <a:rPr lang="en-US" sz="800" b="0" dirty="0" smtClean="0"/>
+                        <a:t>The model omitted the "Euro" part from the compound word "Euro-American," missing a key geographic region.</a:t>
+                      </a:r>
+                      <a:endParaRPr lang="en-US" sz="800" b="0" dirty="0">
+                        <a:latin typeface="+mn-lt"/>
+                        <a:cs typeface="Times New Roman" panose="02020603050405020304" pitchFamily="18" charset="0"/>
+                      </a:endParaRPr>
                     </a:p>
                   </a:txBody>
-                  <a:tcPr marT="45721" marB="45721">
-                    <a:solidFill>
-                      <a:schemeClr val="accent1">
-                        <a:lumMod val="20000"/>
-                        <a:lumOff val="80000"/>
-                      </a:schemeClr>
-                    </a:solidFill>
-                  </a:tcPr>
+                  <a:tcPr marT="45721" marB="45721"/>
+                </a:tc>
+                <a:extLst>
+                  <a:ext uri="{0D108BD9-81ED-4DB2-BD59-A6C34878D82A}">
+                    <a16:rowId xmlns:a16="http://schemas.microsoft.com/office/drawing/2014/main" xmlns="" val="10001"/>
+                  </a:ext>
+                </a:extLst>
+              </a:tr>
+              <a:tr h="345478">
+                <a:tc>
+                  <a:txBody>
+                    <a:bodyPr/>
+                    <a:lstStyle/>
+                    <a:p>
+                      <a:r>
+                        <a:rPr lang="en-GB" sz="700" b="1" dirty="0"/>
+                        <a:t>Negation</a:t>
+                      </a:r>
+                      <a:endParaRPr lang="en-GB" sz="700" b="1" dirty="0">
+                        <a:latin typeface="+mn-lt"/>
+                        <a:cs typeface="Times New Roman" panose="02020603050405020304" pitchFamily="18" charset="0"/>
+                      </a:endParaRPr>
+                    </a:p>
+                  </a:txBody>
+                  <a:tcPr marT="45721" marB="45721"/>
                 </a:tc>
                 <a:tc>
                   <a:txBody>
@@ -3393,80 +3330,53 @@
                     <a:lstStyle/>
                     <a:p>
                       <a:r>
-                        <a:rPr lang="en-US" sz="900" b="0" dirty="0">
-                          <a:latin typeface="+mn-lt"/>
-                          <a:cs typeface="Times New Roman" panose="02020603050405020304" pitchFamily="18" charset="0"/>
+                        <a:rPr lang="hi-IN" sz="700" b="0" kern="1200" dirty="0">
+                          <a:solidFill>
+                            <a:schemeClr val="dk1"/>
+                          </a:solidFill>
+                          <a:effectLst/>
                         </a:rPr>
-                        <a:t>The model hallucinates a non-existent place name “</a:t>
-                      </a:r>
-                      <a:r>
-                        <a:rPr lang="en-US" sz="900" b="0" dirty="0" err="1">
-                          <a:latin typeface="+mn-lt"/>
-                          <a:cs typeface="Times New Roman" panose="02020603050405020304" pitchFamily="18" charset="0"/>
+                        <a:t>मध्यावधिषु निर्वाचनेषु हानीनां सप्ताहपश्चात् बुशमहोदयः आशियादेशे </a:t>
+                      </a:r>
+                      <a:r>
+                        <a:rPr lang="hi-IN" sz="700" b="0" kern="1200" dirty="0">
+                          <a:solidFill>
+                            <a:schemeClr val="tx1"/>
+                          </a:solidFill>
+                          <a:effectLst/>
                         </a:rPr>
-                        <a:t>Gurjan</a:t>
-                      </a:r>
-                      <a:r>
-                        <a:rPr lang="en-US" sz="900" b="0" dirty="0">
-                          <a:latin typeface="+mn-lt"/>
-                          <a:cs typeface="Times New Roman" panose="02020603050405020304" pitchFamily="18" charset="0"/>
+                        <a:t>व्यपारस्य विस्तारविषये प्रेक्षकेभ्यः</a:t>
+                      </a:r>
+                      <a:r>
+                        <a:rPr lang="hi-IN" sz="700" b="0" kern="1200" dirty="0">
+                          <a:solidFill>
+                            <a:srgbClr val="FF0000"/>
+                          </a:solidFill>
+                          <a:effectLst/>
                         </a:rPr>
-                        <a:t> Nagar” instead of “Gurgaon” and further distorts a simple negation into an ungrammatical phrase, showing both </a:t>
-                      </a:r>
-                      <a:r>
-                        <a:rPr lang="en-US" sz="900" b="0" dirty="0" err="1">
-                          <a:latin typeface="+mn-lt"/>
-                          <a:cs typeface="Times New Roman" panose="02020603050405020304" pitchFamily="18" charset="0"/>
+                        <a:t> अकथयत्</a:t>
+                      </a:r>
+                      <a:r>
+                        <a:rPr lang="hi-IN" sz="700" b="0" kern="1200" dirty="0">
+                          <a:solidFill>
+                            <a:schemeClr val="dk1"/>
+                          </a:solidFill>
+                          <a:effectLst/>
                         </a:rPr>
-                        <a:t>toponym</a:t>
-                      </a:r>
-                      <a:r>
-                        <a:rPr lang="en-US" sz="900" b="0" dirty="0">
-                          <a:latin typeface="+mn-lt"/>
-                          <a:cs typeface="Times New Roman" panose="02020603050405020304" pitchFamily="18" charset="0"/>
-                        </a:rPr>
-                        <a:t> fabrication and semantic drift.</a:t>
-                      </a:r>
+                        <a:t>।</a:t>
+                      </a:r>
+                      <a:endParaRPr lang="hi-IN" sz="700" b="0" kern="1200" dirty="0">
+                        <a:solidFill>
+                          <a:schemeClr val="dk1"/>
+                        </a:solidFill>
+                        <a:effectLst/>
+                        <a:latin typeface="+mn-lt"/>
+                        <a:ea typeface="+mn-ea"/>
+                        <a:cs typeface="+mn-cs"/>
+                      </a:endParaRPr>
                     </a:p>
                   </a:txBody>
-                  <a:tcPr marT="45721" marB="45721">
-                    <a:solidFill>
-                      <a:schemeClr val="accent1">
-                        <a:lumMod val="20000"/>
-                        <a:lumOff val="80000"/>
-                      </a:schemeClr>
-                    </a:solidFill>
-                  </a:tcPr>
-                </a:tc>
-                <a:extLst>
-                  <a:ext uri="{0D108BD9-81ED-4DB2-BD59-A6C34878D82A}">
-                    <a16:rowId xmlns="" xmlns:a16="http://schemas.microsoft.com/office/drawing/2014/main" val="10001"/>
-                  </a:ext>
-                </a:extLst>
-              </a:tr>
-              <a:tr h="808756">
-                <a:tc>
-                  <a:txBody>
-                    <a:bodyPr/>
-                    <a:lstStyle/>
-                    <a:p>
-                      <a:r>
-                        <a:rPr lang="en-GB" sz="900" b="1" dirty="0">
-                          <a:latin typeface="+mn-lt"/>
-                          <a:cs typeface="Times New Roman" panose="02020603050405020304" pitchFamily="18" charset="0"/>
-                        </a:rPr>
-                        <a:t>Negation</a:t>
-                      </a:r>
-                    </a:p>
-                  </a:txBody>
-                  <a:tcPr marT="45721" marB="45721">
-                    <a:solidFill>
-                      <a:schemeClr val="accent1">
-                        <a:lumMod val="20000"/>
-                        <a:lumOff val="80000"/>
-                      </a:schemeClr>
-                    </a:solidFill>
-                  </a:tcPr>
+                  <a:tcPr marT="45721" marB="45721"/>
                 </a:tc>
                 <a:tc>
                   <a:txBody>
@@ -3474,26 +3384,53 @@
                     <a:lstStyle/>
                     <a:p>
                       <a:r>
-                        <a:rPr lang="en-GB" sz="900" b="1" dirty="0" smtClean="0">
-                          <a:latin typeface="+mn-lt"/>
-                          <a:cs typeface="Times New Roman" panose="02020603050405020304" pitchFamily="18" charset="0"/>
+                        <a:rPr lang="hi-IN" sz="700" b="0" kern="1200" dirty="0">
+                          <a:solidFill>
+                            <a:schemeClr val="dk1"/>
+                          </a:solidFill>
+                          <a:effectLst/>
                         </a:rPr>
-                        <a:t>GPT-OSS</a:t>
-                      </a:r>
-                      <a:endParaRPr lang="en-GB" sz="900" b="1" dirty="0">
+                        <a:t>मध्यावधियों में चुनावों में हानियों के एक सप्ताह पश्चात्, बुश महोदय ने आशियादेश में </a:t>
+                      </a:r>
+                      <a:r>
+                        <a:rPr lang="hi-IN" sz="700" b="0" kern="1200" dirty="0">
+                          <a:solidFill>
+                            <a:schemeClr val="tx1"/>
+                          </a:solidFill>
+                          <a:effectLst/>
+                        </a:rPr>
+                        <a:t>व्यापार विस्तार के विषय में दर्शकों को </a:t>
+                      </a:r>
+                      <a:r>
+                        <a:rPr lang="hi-IN" sz="700" b="0" kern="1200" dirty="0">
+                          <a:solidFill>
+                            <a:srgbClr val="FF0000"/>
+                          </a:solidFill>
+                          <a:effectLst/>
+                        </a:rPr>
+                        <a:t>कुछ नहीं कहा</a:t>
+                      </a:r>
+                      <a:r>
+                        <a:rPr lang="hi-IN" sz="700" b="0" kern="1200" dirty="0">
+                          <a:solidFill>
+                            <a:schemeClr val="dk1"/>
+                          </a:solidFill>
+                          <a:effectLst/>
+                        </a:rPr>
+                        <a:t>।</a:t>
+                      </a:r>
+                      <a:endParaRPr lang="hi-IN" sz="700" b="0" kern="1200" dirty="0">
+                        <a:solidFill>
+                          <a:schemeClr val="dk1"/>
+                        </a:solidFill>
+                        <a:effectLst/>
                         <a:latin typeface="+mn-lt"/>
-                        <a:cs typeface="Times New Roman" panose="02020603050405020304" pitchFamily="18" charset="0"/>
+                        <a:ea typeface="+mn-ea"/>
+                        <a:cs typeface="+mn-cs"/>
                       </a:endParaRPr>
                     </a:p>
                   </a:txBody>
-                  <a:tcPr marT="45721" marB="45721">
-                    <a:solidFill>
-                      <a:schemeClr val="accent1">
-                        <a:lumMod val="20000"/>
-                        <a:lumOff val="80000"/>
-                      </a:schemeClr>
-                    </a:solidFill>
-                  </a:tcPr>
+                  <a:tcPr marT="45721" marB="45721"/>
                 </a:tc>
                 <a:tc>
                   <a:txBody>
@@ -3501,51 +3438,40 @@
                     <a:lstStyle/>
                     <a:p>
                       <a:r>
-                        <a:rPr lang="hi-IN" sz="900" b="0" kern="1200" dirty="0">
-                          <a:solidFill>
-                            <a:schemeClr val="dk1"/>
-                          </a:solidFill>
-                          <a:effectLst/>
-                          <a:latin typeface="+mn-lt"/>
-                          <a:ea typeface="+mn-ea"/>
-                          <a:cs typeface="+mn-cs"/>
-                        </a:rPr>
-                        <a:t>एते न केवलं दुरासक्तिं जनयन्ति परं </a:t>
-                      </a:r>
-                      <a:r>
-                        <a:rPr lang="hi-IN" sz="900" b="0" kern="1200" dirty="0">
-                          <a:solidFill>
-                            <a:srgbClr val="FF0000"/>
-                          </a:solidFill>
-                          <a:effectLst/>
-                          <a:latin typeface="+mn-lt"/>
-                          <a:ea typeface="+mn-ea"/>
-                          <a:cs typeface="+mn-cs"/>
-                        </a:rPr>
-                        <a:t>गोर्दस्योपरि</a:t>
-                      </a:r>
-                      <a:r>
-                        <a:rPr lang="hi-IN" sz="900" b="0" kern="1200" dirty="0">
-                          <a:solidFill>
-                            <a:schemeClr val="dk1"/>
-                          </a:solidFill>
-                          <a:effectLst/>
-                          <a:latin typeface="+mn-lt"/>
-                          <a:ea typeface="+mn-ea"/>
-                          <a:cs typeface="+mn-cs"/>
-                        </a:rPr>
-                        <a:t> दुष्परिणामन् जनयन्ति च।</a:t>
-                      </a:r>
+                        <a:rPr lang="en-US" sz="800" b="0" dirty="0" smtClean="0"/>
+                        <a:t>The model added an extra negative word to the sentence, completely flipping the original meaning.</a:t>
+                      </a:r>
+                      <a:endParaRPr lang="en-IN" sz="800" b="0" dirty="0">
+                        <a:latin typeface="+mn-lt"/>
+                        <a:cs typeface="Times New Roman" panose="02020603050405020304" pitchFamily="18" charset="0"/>
+                      </a:endParaRPr>
                     </a:p>
                   </a:txBody>
-                  <a:tcPr marT="45721" marB="45721">
-                    <a:solidFill>
-                      <a:schemeClr val="accent1">
-                        <a:lumMod val="20000"/>
-                        <a:lumOff val="80000"/>
-                      </a:schemeClr>
-                    </a:solidFill>
-                  </a:tcPr>
+                  <a:tcPr marT="45721" marB="45721"/>
+                </a:tc>
+                <a:extLst>
+                  <a:ext uri="{0D108BD9-81ED-4DB2-BD59-A6C34878D82A}">
+                    <a16:rowId xmlns:a16="http://schemas.microsoft.com/office/drawing/2014/main" xmlns="" val="10002"/>
+                  </a:ext>
+                </a:extLst>
+              </a:tr>
+              <a:tr h="736152">
+                <a:tc>
+                  <a:txBody>
+                    <a:bodyPr/>
+                    <a:lstStyle/>
+                    <a:p>
+                      <a:r>
+                        <a:rPr lang="en-GB" sz="700" b="1" dirty="0"/>
+                        <a:t>Number</a:t>
+                      </a:r>
+                      <a:endParaRPr lang="en-GB" sz="700" b="1" dirty="0">
+                        <a:latin typeface="+mn-lt"/>
+                        <a:cs typeface="Times New Roman" panose="02020603050405020304" pitchFamily="18" charset="0"/>
+                      </a:endParaRPr>
+                    </a:p>
+                  </a:txBody>
+                  <a:tcPr marT="45721" marB="45721"/>
                 </a:tc>
                 <a:tc>
                   <a:txBody>
@@ -3553,51 +3479,35 @@
                     <a:lstStyle/>
                     <a:p>
                       <a:r>
-                        <a:rPr lang="hi-IN" sz="900" b="0" kern="1200" dirty="0">
-                          <a:solidFill>
-                            <a:schemeClr val="dk1"/>
-                          </a:solidFill>
-                          <a:effectLst/>
-                          <a:latin typeface="+mn-lt"/>
-                          <a:ea typeface="+mn-ea"/>
-                          <a:cs typeface="+mn-cs"/>
-                        </a:rPr>
-                        <a:t>इनमें से केबल अच्छी नहीं है, और उनका ऊपर </a:t>
-                      </a:r>
-                      <a:r>
-                        <a:rPr lang="hi-IN" sz="900" b="0" kern="1200" dirty="0">
+                        <a:rPr lang="hi-IN" sz="700" b="0" kern="1200" dirty="0">
                           <a:solidFill>
                             <a:srgbClr val="FF0000"/>
                           </a:solidFill>
                           <a:effectLst/>
-                          <a:latin typeface="+mn-lt"/>
-                          <a:ea typeface="+mn-ea"/>
-                          <a:cs typeface="+mn-cs"/>
                         </a:rPr>
-                        <a:t>गौर्डस्थ</a:t>
-                      </a:r>
-                      <a:r>
-                        <a:rPr lang="hi-IN" sz="900" b="0" kern="1200" dirty="0">
+                        <a:t>78 </a:t>
+                      </a:r>
+                      <a:r>
+                        <a:rPr lang="hi-IN" sz="700" b="0" kern="1200" dirty="0">
                           <a:solidFill>
-                            <a:schemeClr val="dk1"/>
+                            <a:schemeClr val="tx1"/>
                           </a:solidFill>
                           <a:effectLst/>
-                          <a:latin typeface="+mn-lt"/>
-                          <a:ea typeface="+mn-ea"/>
-                          <a:cs typeface="+mn-cs"/>
                         </a:rPr>
-                        <a:t> के ऊर्ध्व में भी खराब परिफल उत्पन्न करते हूँ।</a:t>
-                      </a:r>
+                        <a:t>संस्तुतिषु विद्यमाना प्रथमा संस्तुतिः अस्ति यत् नूतनः राजनयिकः उपक्रमः अस्य वर्षस्य समाप्तिपूर्वं प्रारभ्यः येन ईराकदेशस्य सीमाः आक्रमकान्तरायात् सुरक्षिताः स्युः तथा च तस्य सीमावर्तिदेशैः सह राजनयिकसम्बन्धानां पुनःस्थापना स्यात्।</a:t>
+                      </a:r>
+                      <a:endParaRPr lang="hi-IN" sz="700" b="0" kern="1200" dirty="0">
+                        <a:solidFill>
+                          <a:schemeClr val="tx1"/>
+                        </a:solidFill>
+                        <a:effectLst/>
+                        <a:latin typeface="+mn-lt"/>
+                        <a:ea typeface="+mn-ea"/>
+                        <a:cs typeface="+mn-cs"/>
+                      </a:endParaRPr>
                     </a:p>
                   </a:txBody>
-                  <a:tcPr marT="45721" marB="45721">
-                    <a:solidFill>
-                      <a:schemeClr val="accent1">
-                        <a:lumMod val="20000"/>
-                        <a:lumOff val="80000"/>
-                      </a:schemeClr>
-                    </a:solidFill>
-                  </a:tcPr>
+                  <a:tcPr marT="45721" marB="45721"/>
                 </a:tc>
                 <a:tc>
                   <a:txBody>
@@ -3605,93 +3515,26 @@
                     <a:lstStyle/>
                     <a:p>
                       <a:r>
-                        <a:rPr lang="en-IN" sz="900" b="0" dirty="0">
-                          <a:latin typeface="+mn-lt"/>
-                          <a:cs typeface="Times New Roman" panose="02020603050405020304" pitchFamily="18" charset="0"/>
+                        <a:rPr lang="hi-IN" sz="700" b="0" kern="1200" dirty="0">
+                          <a:solidFill>
+                            <a:schemeClr val="tx1"/>
+                          </a:solidFill>
+                          <a:effectLst/>
                         </a:rPr>
-                        <a:t>The model hallucinated a non-existent </a:t>
-                      </a:r>
-                      <a:r>
-                        <a:rPr lang="en-IN" sz="900" b="0" dirty="0" err="1">
-                          <a:latin typeface="+mn-lt"/>
-                          <a:cs typeface="Times New Roman" panose="02020603050405020304" pitchFamily="18" charset="0"/>
-                        </a:rPr>
-                        <a:t>toponym</a:t>
-                      </a:r>
-                      <a:r>
-                        <a:rPr lang="en-IN" sz="900" b="0" dirty="0">
-                          <a:latin typeface="+mn-lt"/>
-                          <a:cs typeface="Times New Roman" panose="02020603050405020304" pitchFamily="18" charset="0"/>
-                        </a:rPr>
-                        <a:t>-like entity “</a:t>
-                      </a:r>
-                      <a:r>
-                        <a:rPr lang="en-IN" sz="900" b="0" dirty="0" err="1">
-                          <a:latin typeface="+mn-lt"/>
-                          <a:cs typeface="Times New Roman" panose="02020603050405020304" pitchFamily="18" charset="0"/>
-                        </a:rPr>
-                        <a:t>Gourdsth</a:t>
-                      </a:r>
-                      <a:r>
-                        <a:rPr lang="en-IN" sz="900" b="0" dirty="0">
-                          <a:latin typeface="+mn-lt"/>
-                          <a:cs typeface="Times New Roman" panose="02020603050405020304" pitchFamily="18" charset="0"/>
-                        </a:rPr>
-                        <a:t>”</a:t>
-                      </a:r>
-                      <a:r>
-                        <a:rPr lang="hi-IN" sz="900" b="0" dirty="0">
-                          <a:latin typeface="+mn-lt"/>
-                        </a:rPr>
-                        <a:t>, </a:t>
-                      </a:r>
-                      <a:r>
-                        <a:rPr lang="en-IN" sz="900" b="0" dirty="0">
-                          <a:latin typeface="+mn-lt"/>
-                          <a:cs typeface="Times New Roman" panose="02020603050405020304" pitchFamily="18" charset="0"/>
-                        </a:rPr>
-                        <a:t>introducing an artificial location reference that is not present in the source and distorting the original non-spatial philosophical statement.</a:t>
-                      </a:r>
+                        <a:t>संस्तृतियों में प्रमुख रूप से यह कहा गया है कि वर्तमान वर्ष के समाप्ति से पहले आरम्भ हुई नवीन कूटनीति पहल इराक के सीमाओं को आक्रमणकारियों से सुरक्षित करेगी तथा उसके सीमा-स्थलीय देशों के साथ कूटनीतिक संबंधों को पुनः स्थापित करेगी।</a:t>
+                      </a:r>
+                      <a:endParaRPr lang="hi-IN" sz="700" b="0" kern="1200" dirty="0">
+                        <a:solidFill>
+                          <a:schemeClr val="tx1"/>
+                        </a:solidFill>
+                        <a:effectLst/>
+                        <a:latin typeface="+mn-lt"/>
+                        <a:ea typeface="+mn-ea"/>
+                        <a:cs typeface="+mn-cs"/>
+                      </a:endParaRPr>
                     </a:p>
                   </a:txBody>
-                  <a:tcPr marT="45721" marB="45721">
-                    <a:solidFill>
-                      <a:schemeClr val="accent1">
-                        <a:lumMod val="20000"/>
-                        <a:lumOff val="80000"/>
-                      </a:schemeClr>
-                    </a:solidFill>
-                  </a:tcPr>
-                </a:tc>
-                <a:extLst>
-                  <a:ext uri="{0D108BD9-81ED-4DB2-BD59-A6C34878D82A}">
-                    <a16:rowId xmlns="" xmlns:a16="http://schemas.microsoft.com/office/drawing/2014/main" val="10002"/>
-                  </a:ext>
-                </a:extLst>
-              </a:tr>
-              <a:tr h="961734">
-                <a:tc>
-                  <a:txBody>
-                    <a:bodyPr/>
-                    <a:lstStyle/>
-                    <a:p>
-                      <a:r>
-                        <a:rPr lang="en-GB" sz="900" b="1" dirty="0">
-                          <a:latin typeface="+mn-lt"/>
-                          <a:cs typeface="Times New Roman" panose="02020603050405020304" pitchFamily="18" charset="0"/>
-                        </a:rPr>
-                        <a:t>Person</a:t>
-                      </a:r>
-                    </a:p>
-                  </a:txBody>
-                  <a:tcPr marT="45721" marB="45721">
-                    <a:solidFill>
-                      <a:schemeClr val="accent1">
-                        <a:lumMod val="20000"/>
-                        <a:lumOff val="80000"/>
-                      </a:schemeClr>
-                    </a:solidFill>
-                  </a:tcPr>
+                  <a:tcPr marT="45721" marB="45721"/>
                 </a:tc>
                 <a:tc>
                   <a:txBody>
@@ -3699,26 +3542,47 @@
                     <a:lstStyle/>
                     <a:p>
                       <a:r>
-                        <a:rPr lang="en-GB" sz="900" b="1" dirty="0" smtClean="0">
-                          <a:latin typeface="+mn-lt"/>
-                          <a:cs typeface="Times New Roman" panose="02020603050405020304" pitchFamily="18" charset="0"/>
+                        <a:rPr lang="en-US" sz="800" b="0" dirty="0" smtClean="0">
+                          <a:solidFill>
+                            <a:schemeClr val="tx1"/>
+                          </a:solidFill>
                         </a:rPr>
-                        <a:t>GPT-OSS</a:t>
-                      </a:r>
-                      <a:endParaRPr lang="en-GB" sz="900" b="1" dirty="0">
+                        <a:t>The model dropped the specific count of "78" from the text entirely.</a:t>
+                      </a:r>
+                      <a:endParaRPr lang="en-US" sz="800" b="0" dirty="0">
+                        <a:solidFill>
+                          <a:schemeClr val="tx1"/>
+                        </a:solidFill>
                         <a:latin typeface="+mn-lt"/>
                         <a:cs typeface="Times New Roman" panose="02020603050405020304" pitchFamily="18" charset="0"/>
                       </a:endParaRPr>
                     </a:p>
                   </a:txBody>
-                  <a:tcPr marT="45721" marB="45721">
-                    <a:solidFill>
-                      <a:schemeClr val="accent1">
-                        <a:lumMod val="20000"/>
-                        <a:lumOff val="80000"/>
-                      </a:schemeClr>
-                    </a:solidFill>
-                  </a:tcPr>
+                  <a:tcPr marT="45721" marB="45721"/>
+                </a:tc>
+                <a:extLst>
+                  <a:ext uri="{0D108BD9-81ED-4DB2-BD59-A6C34878D82A}">
+                    <a16:rowId xmlns:a16="http://schemas.microsoft.com/office/drawing/2014/main" xmlns="" val="10004"/>
+                  </a:ext>
+                </a:extLst>
+              </a:tr>
+              <a:tr h="642460">
+                <a:tc>
+                  <a:txBody>
+                    <a:bodyPr/>
+                    <a:lstStyle/>
+                    <a:p>
+                      <a:r>
+                        <a:rPr lang="en-GB" sz="700" b="1" dirty="0"/>
+                        <a:t>Person</a:t>
+                      </a:r>
+                      <a:endParaRPr lang="en-GB" sz="700" b="1" dirty="0">
+                        <a:latin typeface="+mn-lt"/>
+                        <a:cs typeface="Times New Roman" panose="02020603050405020304" pitchFamily="18" charset="0"/>
+                      </a:endParaRPr>
+                    </a:p>
+                  </a:txBody>
+                  <a:tcPr marT="45721" marB="45721"/>
                 </a:tc>
                 <a:tc>
                   <a:txBody>
@@ -3726,75 +3590,44 @@
                     <a:lstStyle/>
                     <a:p>
                       <a:r>
-                        <a:rPr lang="hi-IN" sz="900" b="0" kern="1200" dirty="0">
+                        <a:rPr lang="hi-IN" sz="700" b="0" kern="1200" dirty="0">
                           <a:solidFill>
                             <a:schemeClr val="dk1"/>
                           </a:solidFill>
                           <a:effectLst/>
-                          <a:latin typeface="+mn-lt"/>
-                          <a:ea typeface="+mn-ea"/>
-                          <a:cs typeface="+mn-cs"/>
                         </a:rPr>
-                        <a:t>तस्मात्‌ </a:t>
-                      </a:r>
-                      <a:r>
-                        <a:rPr lang="hi-IN" sz="900" b="0" kern="1200" dirty="0">
+                        <a:t>पेनसिल्वानियाराज्यस्य बालरुग्णालयं पिट्सबर्ग इत्यत्र कार्यं कृतवान् चिकित्सिका उद्दीप्तायै हत्यायै अभियुक्ता यदा </a:t>
+                      </a:r>
+                      <a:r>
+                        <a:rPr lang="hi-IN" sz="700" b="0" kern="1200" dirty="0">
                           <a:solidFill>
                             <a:srgbClr val="FF0000"/>
                           </a:solidFill>
                           <a:effectLst/>
-                          <a:latin typeface="+mn-lt"/>
-                          <a:ea typeface="+mn-ea"/>
-                          <a:cs typeface="+mn-cs"/>
                         </a:rPr>
-                        <a:t>विश्वकर्मा</a:t>
-                      </a:r>
-                      <a:r>
-                        <a:rPr lang="hi-IN" sz="900" b="0" kern="1200" dirty="0">
+                        <a:t>तस्याः मता </a:t>
+                      </a:r>
+                      <a:r>
+                        <a:rPr lang="hi-IN" sz="700" b="0" kern="1200" dirty="0">
                           <a:solidFill>
                             <a:schemeClr val="dk1"/>
                           </a:solidFill>
                           <a:effectLst/>
-                          <a:latin typeface="+mn-lt"/>
-                          <a:ea typeface="+mn-ea"/>
-                          <a:cs typeface="+mn-cs"/>
                         </a:rPr>
-                        <a:t> </a:t>
-                      </a:r>
-                      <a:r>
-                        <a:rPr lang="hi-IN" sz="900" b="0" kern="1200" dirty="0">
-                          <a:solidFill>
-                            <a:srgbClr val="FF0000"/>
-                          </a:solidFill>
-                          <a:effectLst/>
-                          <a:latin typeface="+mn-lt"/>
-                          <a:ea typeface="+mn-ea"/>
-                          <a:cs typeface="+mn-cs"/>
-                        </a:rPr>
-                        <a:t>गर्जनं कुर्वन्तं</a:t>
-                      </a:r>
-                      <a:r>
-                        <a:rPr lang="hi-IN" sz="900" b="0" kern="1200" dirty="0">
-                          <a:solidFill>
-                            <a:schemeClr val="dk1"/>
-                          </a:solidFill>
-                          <a:effectLst/>
-                          <a:latin typeface="+mn-lt"/>
-                          <a:ea typeface="+mn-ea"/>
-                          <a:cs typeface="+mn-cs"/>
-                        </a:rPr>
-                        <a:t> वज्रं निर्मितवान्‌।</a:t>
-                      </a:r>
+                        <a:t>तस्याः यनस्य पृष्ठे कोशे बुधवासरे मृता प्राप्ता इति ओहयोनगरस्य अधिकारिणः वदन्ति।</a:t>
+                      </a:r>
+                      <a:endParaRPr lang="hi-IN" sz="700" b="0" kern="1200" dirty="0">
+                        <a:solidFill>
+                          <a:schemeClr val="dk1"/>
+                        </a:solidFill>
+                        <a:effectLst/>
+                        <a:latin typeface="+mn-lt"/>
+                        <a:ea typeface="+mn-ea"/>
+                        <a:cs typeface="+mn-cs"/>
+                      </a:endParaRPr>
                     </a:p>
                   </a:txBody>
-                  <a:tcPr marT="45721" marB="45721">
-                    <a:solidFill>
-                      <a:schemeClr val="accent1">
-                        <a:lumMod val="20000"/>
-                        <a:lumOff val="80000"/>
-                      </a:schemeClr>
-                    </a:solidFill>
-                  </a:tcPr>
+                  <a:tcPr marT="45721" marB="45721"/>
                 </a:tc>
                 <a:tc>
                   <a:txBody>
@@ -3802,75 +3635,44 @@
                     <a:lstStyle/>
                     <a:p>
                       <a:r>
-                        <a:rPr lang="hi-IN" sz="900" b="0" kern="1200" dirty="0">
+                        <a:rPr lang="hi-IN" sz="700" b="0" kern="1200" dirty="0">
                           <a:solidFill>
                             <a:schemeClr val="dk1"/>
                           </a:solidFill>
                           <a:effectLst/>
-                          <a:latin typeface="+mn-lt"/>
-                          <a:ea typeface="+mn-ea"/>
-                          <a:cs typeface="+mn-cs"/>
                         </a:rPr>
-                        <a:t>इसलिए </a:t>
-                      </a:r>
-                      <a:r>
-                        <a:rPr lang="hi-IN" sz="900" b="0" kern="1200" dirty="0">
+                        <a:t>पेनसिल्वेनिया राज्य के पिट्सबर्ग में स्थित बालरोग अस्पताल में एक चिकित्सिका को हत्या के आरोप में अभियुक्त किया गया। उसके अनुसार, </a:t>
+                      </a:r>
+                      <a:r>
+                        <a:rPr lang="hi-IN" sz="700" b="0" kern="1200" dirty="0">
                           <a:solidFill>
                             <a:srgbClr val="FF0000"/>
                           </a:solidFill>
                           <a:effectLst/>
-                          <a:latin typeface="+mn-lt"/>
-                          <a:ea typeface="+mn-ea"/>
-                          <a:cs typeface="+mn-cs"/>
                         </a:rPr>
-                        <a:t>वैश्यकरमा घोषणा करते हुए वच्र</a:t>
-                      </a:r>
-                      <a:r>
-                        <a:rPr lang="hi-IN" sz="900" b="0" kern="1200" dirty="0">
+                        <a:t>उसके पति</a:t>
+                      </a:r>
+                      <a:r>
+                        <a:rPr lang="hi-IN" sz="700" b="0" kern="1200" dirty="0">
                           <a:solidFill>
                             <a:schemeClr val="dk1"/>
                           </a:solidFill>
                           <a:effectLst/>
-                          <a:latin typeface="+mn-lt"/>
-                          <a:ea typeface="+mn-ea"/>
-                          <a:cs typeface="+mn-cs"/>
                         </a:rPr>
-                        <a:t> की रचना </a:t>
-                      </a:r>
-                      <a:r>
-                        <a:rPr lang="hi-IN" sz="900" b="0" kern="1200" dirty="0">
-                          <a:solidFill>
-                            <a:srgbClr val="FF0000"/>
-                          </a:solidFill>
-                          <a:effectLst/>
-                          <a:latin typeface="+mn-lt"/>
-                          <a:ea typeface="+mn-ea"/>
-                          <a:cs typeface="+mn-cs"/>
-                        </a:rPr>
-                        <a:t>किल चला</a:t>
-                      </a:r>
-                      <a:r>
-                        <a:rPr lang="hi-IN" sz="900" b="0" kern="1200" dirty="0">
-                          <a:solidFill>
-                            <a:schemeClr val="dk1"/>
-                          </a:solidFill>
-                          <a:effectLst/>
-                          <a:latin typeface="+mn-lt"/>
-                          <a:ea typeface="+mn-ea"/>
-                          <a:cs typeface="+mn-cs"/>
-                        </a:rPr>
-                        <a:t>।</a:t>
-                      </a:r>
+                        <a:t> का शरीर बुध को मिला और उसे मृत पाया गया। ओहायोनगर के अधिकारी यह बात कह रहे हैं।</a:t>
+                      </a:r>
+                      <a:endParaRPr lang="hi-IN" sz="700" b="0" kern="1200" dirty="0">
+                        <a:solidFill>
+                          <a:schemeClr val="dk1"/>
+                        </a:solidFill>
+                        <a:effectLst/>
+                        <a:latin typeface="+mn-lt"/>
+                        <a:ea typeface="+mn-ea"/>
+                        <a:cs typeface="+mn-cs"/>
+                      </a:endParaRPr>
                     </a:p>
                   </a:txBody>
-                  <a:tcPr marT="45721" marB="45721">
-                    <a:solidFill>
-                      <a:schemeClr val="accent1">
-                        <a:lumMod val="20000"/>
-                        <a:lumOff val="80000"/>
-                      </a:schemeClr>
-                    </a:solidFill>
-                  </a:tcPr>
+                  <a:tcPr marT="45721" marB="45721"/>
                 </a:tc>
                 <a:tc>
                   <a:txBody>
@@ -3895,66 +3697,44 @@
                         <a:defRPr/>
                       </a:pPr>
                       <a:r>
-                        <a:rPr lang="en-US" sz="900" b="0" dirty="0">
-                          <a:latin typeface="+mn-lt"/>
-                          <a:cs typeface="Times New Roman" panose="02020603050405020304" pitchFamily="18" charset="0"/>
-                        </a:rPr>
-                        <a:t>The model hallucinates a fictional agent-action sequence by distorting “</a:t>
-                      </a:r>
-                      <a:r>
-                        <a:rPr lang="en-US" sz="900" b="0" dirty="0" err="1">
-                          <a:latin typeface="+mn-lt"/>
-                          <a:cs typeface="Times New Roman" panose="02020603050405020304" pitchFamily="18" charset="0"/>
-                        </a:rPr>
-                        <a:t>Vishwakarma</a:t>
-                      </a:r>
-                      <a:r>
-                        <a:rPr lang="en-US" sz="900" b="0" dirty="0">
-                          <a:latin typeface="+mn-lt"/>
-                          <a:cs typeface="Times New Roman" panose="02020603050405020304" pitchFamily="18" charset="0"/>
-                        </a:rPr>
-                        <a:t>” and turning a simple statement about forging a thunderbolt into an incoherent event with unrelated actions and non-existent narrative details.</a:t>
-                      </a:r>
+                        <a:rPr lang="en-US" sz="800" b="0" dirty="0"/>
+                        <a:t>The model hallucinated an entirely non-existent character (her husband</a:t>
+                      </a:r>
+                      <a:r>
+                        <a:rPr lang="en-US" sz="800" b="0" dirty="0" smtClean="0"/>
+                        <a:t>).</a:t>
+                      </a:r>
+                      <a:endParaRPr lang="en-US" sz="800" b="0" dirty="0">
+                        <a:latin typeface="+mn-lt"/>
+                        <a:cs typeface="Times New Roman" panose="02020603050405020304" pitchFamily="18" charset="0"/>
+                      </a:endParaRPr>
                     </a:p>
                   </a:txBody>
-                  <a:tcPr marT="45721" marB="45721">
-                    <a:solidFill>
-                      <a:schemeClr val="accent1">
-                        <a:lumMod val="20000"/>
-                        <a:lumOff val="80000"/>
-                      </a:schemeClr>
-                    </a:solidFill>
-                  </a:tcPr>
+                  <a:tcPr marT="45721" marB="45721"/>
                 </a:tc>
                 <a:extLst>
                   <a:ext uri="{0D108BD9-81ED-4DB2-BD59-A6C34878D82A}">
-                    <a16:rowId xmlns="" xmlns:a16="http://schemas.microsoft.com/office/drawing/2014/main" val="10003"/>
+                    <a16:rowId xmlns:a16="http://schemas.microsoft.com/office/drawing/2014/main" xmlns="" val="10006"/>
                   </a:ext>
                 </a:extLst>
               </a:tr>
-              <a:tr h="929406">
+              <a:tr h="548769">
                 <a:tc>
                   <a:txBody>
                     <a:bodyPr/>
                     <a:lstStyle/>
                     <a:p>
                       <a:r>
-                        <a:rPr lang="en-GB" sz="900" b="1" dirty="0">
-                          <a:latin typeface="+mn-lt"/>
-                          <a:cs typeface="Times New Roman" panose="02020603050405020304" pitchFamily="18" charset="0"/>
-                        </a:rPr>
-                        <a:t>Number</a:t>
-                      </a:r>
+                        <a:rPr lang="en-GB" sz="700" b="1" dirty="0"/>
+                        <a:t>Script</a:t>
+                      </a:r>
+                      <a:endParaRPr lang="en-GB" sz="700" b="1" dirty="0">
+                        <a:latin typeface="+mn-lt"/>
+                        <a:cs typeface="Times New Roman" panose="02020603050405020304" pitchFamily="18" charset="0"/>
+                      </a:endParaRPr>
                     </a:p>
                   </a:txBody>
-                  <a:tcPr marT="45721" marB="45721">
-                    <a:solidFill>
-                      <a:schemeClr val="accent1">
-                        <a:lumMod val="20000"/>
-                        <a:lumOff val="80000"/>
-                      </a:schemeClr>
-                    </a:solidFill>
-                  </a:tcPr>
+                  <a:tcPr marT="45721" marB="45721"/>
                 </a:tc>
                 <a:tc>
                   <a:txBody>
@@ -3962,207 +3742,33 @@
                     <a:lstStyle/>
                     <a:p>
                       <a:r>
-                        <a:rPr lang="en-GB" sz="900" b="1" dirty="0" smtClean="0">
-                          <a:latin typeface="+mn-lt"/>
-                          <a:cs typeface="Times New Roman" panose="02020603050405020304" pitchFamily="18" charset="0"/>
+                        <a:rPr lang="hi-IN" sz="700" b="0" kern="1200" dirty="0">
+                          <a:solidFill>
+                            <a:schemeClr val="dk1"/>
+                          </a:solidFill>
+                          <a:effectLst/>
                         </a:rPr>
-                        <a:t>GPT-OSS</a:t>
-                      </a:r>
-                      <a:endParaRPr lang="en-GB" sz="900" b="1" dirty="0">
-                        <a:latin typeface="+mn-lt"/>
-                        <a:cs typeface="Times New Roman" panose="02020603050405020304" pitchFamily="18" charset="0"/>
-                      </a:endParaRPr>
-                    </a:p>
-                  </a:txBody>
-                  <a:tcPr marT="45721" marB="45721">
-                    <a:solidFill>
-                      <a:schemeClr val="accent1">
-                        <a:lumMod val="20000"/>
-                        <a:lumOff val="80000"/>
-                      </a:schemeClr>
-                    </a:solidFill>
-                  </a:tcPr>
-                </a:tc>
-                <a:tc>
-                  <a:txBody>
-                    <a:bodyPr/>
-                    <a:lstStyle/>
-                    <a:p>
-                      <a:r>
-                        <a:rPr lang="hi-IN" sz="900" b="0" kern="1200" dirty="0">
+                        <a:t>२०११ तमे वर्षे, कश्यपः </a:t>
+                      </a:r>
+                      <a:r>
+                        <a:rPr lang="hi-IN" sz="700" b="0" kern="1200" dirty="0">
                           <a:solidFill>
                             <a:srgbClr val="FF0000"/>
                           </a:solidFill>
                           <a:effectLst/>
-                          <a:latin typeface="+mn-lt"/>
-                          <a:ea typeface="+mn-ea"/>
-                          <a:cs typeface="+mn-cs"/>
                         </a:rPr>
-                        <a:t>2017 </a:t>
-                      </a:r>
-                      <a:r>
-                        <a:rPr lang="hi-IN" sz="900" b="0" kern="1200" dirty="0">
+                        <a:t>दट्-गर्ल्-इन्-येल्लो-बूट्स् </a:t>
+                      </a:r>
+                      <a:r>
+                        <a:rPr lang="hi-IN" sz="700" b="0" kern="1200" dirty="0">
                           <a:solidFill>
                             <a:schemeClr val="dk1"/>
                           </a:solidFill>
                           <a:effectLst/>
-                          <a:latin typeface="+mn-lt"/>
-                          <a:ea typeface="+mn-ea"/>
-                          <a:cs typeface="+mn-cs"/>
                         </a:rPr>
-                        <a:t>वर्षस्य उत्तरार्धे सिमनोफमहोदयः दूरदर्शनस्य क्युव्हीसी इति विपणिवाहिन्यां प्रकटीभूतः।</a:t>
-                      </a:r>
-                    </a:p>
-                  </a:txBody>
-                  <a:tcPr marT="45721" marB="45721">
-                    <a:solidFill>
-                      <a:schemeClr val="accent1">
-                        <a:lumMod val="20000"/>
-                        <a:lumOff val="80000"/>
-                      </a:schemeClr>
-                    </a:solidFill>
-                  </a:tcPr>
-                </a:tc>
-                <a:tc>
-                  <a:txBody>
-                    <a:bodyPr/>
-                    <a:lstStyle/>
-                    <a:p>
-                      <a:r>
-                        <a:rPr lang="hi-IN" sz="900" b="0" kern="1200" dirty="0">
-                          <a:solidFill>
-                            <a:srgbClr val="FF0000"/>
-                          </a:solidFill>
-                          <a:effectLst/>
-                          <a:latin typeface="+mn-lt"/>
-                          <a:ea typeface="+mn-ea"/>
-                          <a:cs typeface="+mn-cs"/>
-                        </a:rPr>
-                        <a:t>2007</a:t>
-                      </a:r>
-                      <a:r>
-                        <a:rPr lang="hi-IN" sz="900" b="0" kern="1200" dirty="0">
-                          <a:solidFill>
-                            <a:schemeClr val="dk1"/>
-                          </a:solidFill>
-                          <a:effectLst/>
-                          <a:latin typeface="+mn-lt"/>
-                          <a:ea typeface="+mn-ea"/>
-                          <a:cs typeface="+mn-cs"/>
-                        </a:rPr>
-                        <a:t> के अंत में सिंमानोफ महोत्सव दुर्गम चैनल के क्वीवीसि बिक्री के माध्यम से प्रसारित हुए।</a:t>
-                      </a:r>
-                    </a:p>
-                  </a:txBody>
-                  <a:tcPr marT="45721" marB="45721">
-                    <a:solidFill>
-                      <a:schemeClr val="accent1">
-                        <a:lumMod val="20000"/>
-                        <a:lumOff val="80000"/>
-                      </a:schemeClr>
-                    </a:solidFill>
-                  </a:tcPr>
-                </a:tc>
-                <a:tc>
-                  <a:txBody>
-                    <a:bodyPr/>
-                    <a:lstStyle/>
-                    <a:p>
-                      <a:r>
-                        <a:rPr lang="en-US" sz="900" b="0" dirty="0">
-                          <a:latin typeface="+mn-lt"/>
-                          <a:cs typeface="Times New Roman" panose="02020603050405020304" pitchFamily="18" charset="0"/>
-                        </a:rPr>
-                        <a:t>The model hallucinates by changing the year, altering the named entity, and replacing the original broadcast appearance on a television channel with an incorrect and fabricated description involving different entities and an unrelated sales-based context.</a:t>
-                      </a:r>
-                    </a:p>
-                  </a:txBody>
-                  <a:tcPr marT="45721" marB="45721">
-                    <a:solidFill>
-                      <a:schemeClr val="accent1">
-                        <a:lumMod val="20000"/>
-                        <a:lumOff val="80000"/>
-                      </a:schemeClr>
-                    </a:solidFill>
-                  </a:tcPr>
-                </a:tc>
-                <a:extLst>
-                  <a:ext uri="{0D108BD9-81ED-4DB2-BD59-A6C34878D82A}">
-                    <a16:rowId xmlns="" xmlns:a16="http://schemas.microsoft.com/office/drawing/2014/main" val="10004"/>
-                  </a:ext>
-                </a:extLst>
-              </a:tr>
-              <a:tr h="1059304">
-                <a:tc>
-                  <a:txBody>
-                    <a:bodyPr/>
-                    <a:lstStyle/>
-                    <a:p>
-                      <a:r>
-                        <a:rPr lang="en-GB" sz="900" b="1" dirty="0">
-                          <a:latin typeface="+mn-lt"/>
-                          <a:cs typeface="Times New Roman" panose="02020603050405020304" pitchFamily="18" charset="0"/>
-                        </a:rPr>
-                        <a:t>Script</a:t>
-                      </a:r>
-                    </a:p>
-                  </a:txBody>
-                  <a:tcPr marT="45721" marB="45721">
-                    <a:solidFill>
-                      <a:schemeClr val="accent1">
-                        <a:lumMod val="20000"/>
-                        <a:lumOff val="80000"/>
-                      </a:schemeClr>
-                    </a:solidFill>
-                  </a:tcPr>
-                </a:tc>
-                <a:tc>
-                  <a:txBody>
-                    <a:bodyPr/>
-                    <a:lstStyle/>
-                    <a:p>
-                      <a:r>
-                        <a:rPr lang="en-GB" sz="900" b="1" dirty="0" smtClean="0">
-                          <a:latin typeface="+mn-lt"/>
-                          <a:cs typeface="Times New Roman" panose="02020603050405020304" pitchFamily="18" charset="0"/>
-                        </a:rPr>
-                        <a:t>GPT-OSS</a:t>
-                      </a:r>
-                      <a:endParaRPr lang="en-GB" sz="900" b="1" dirty="0">
-                        <a:latin typeface="+mn-lt"/>
-                        <a:cs typeface="Times New Roman" panose="02020603050405020304" pitchFamily="18" charset="0"/>
-                      </a:endParaRPr>
-                    </a:p>
-                  </a:txBody>
-                  <a:tcPr marT="45721" marB="45721">
-                    <a:solidFill>
-                      <a:schemeClr val="accent1">
-                        <a:lumMod val="20000"/>
-                        <a:lumOff val="80000"/>
-                      </a:schemeClr>
-                    </a:solidFill>
-                  </a:tcPr>
-                </a:tc>
-                <a:tc>
-                  <a:txBody>
-                    <a:bodyPr/>
-                    <a:lstStyle/>
-                    <a:p>
-                      <a:r>
-                        <a:rPr lang="hi-IN" sz="900" b="0" kern="1200" dirty="0">
-                          <a:solidFill>
-                            <a:schemeClr val="dk1"/>
-                          </a:solidFill>
-                          <a:effectLst/>
-                          <a:latin typeface="+mn-lt"/>
-                          <a:ea typeface="+mn-ea"/>
-                          <a:cs typeface="+mn-cs"/>
-                        </a:rPr>
-                        <a:t>यद्यपि प्लवपश्चात् जलस्तरः केचन फीटमात्रं वर्धिष्यति तर्हि अधिकारिणः आशासन्ते यत् नष्टानां मृदादण्डानां पुनर्स्थापनायै इदम् अलं भवेत्।</a:t>
-                      </a:r>
-                    </a:p>
-                    <a:p>
-                      <a:endParaRPr lang="hi-IN" sz="900" b="0" kern="1200" dirty="0">
+                        <a:t>इत्येतं चित्रं निर्देशितवान्, इदं च कल्की कोश्लिन् इत्यनया अभिनीतं थ्रिल्लर्-चित्रमासीत्, यस्य सापि सहलेखिका आसीत्।</a:t>
+                      </a:r>
+                      <a:endParaRPr lang="hi-IN" sz="700" b="0" kern="1200" dirty="0">
                         <a:solidFill>
                           <a:schemeClr val="dk1"/>
                         </a:solidFill>
@@ -4173,14 +3779,7 @@
                       </a:endParaRPr>
                     </a:p>
                   </a:txBody>
-                  <a:tcPr marT="45721" marB="45721">
-                    <a:solidFill>
-                      <a:schemeClr val="accent1">
-                        <a:lumMod val="20000"/>
-                        <a:lumOff val="80000"/>
-                      </a:schemeClr>
-                    </a:solidFill>
-                  </a:tcPr>
+                  <a:tcPr marT="45721" marB="45721"/>
                 </a:tc>
                 <a:tc>
                   <a:txBody>
@@ -4188,92 +3787,42 @@
                     <a:lstStyle/>
                     <a:p>
                       <a:r>
-                        <a:rPr lang="hi-IN" sz="900" b="0" kern="1200" dirty="0">
+                        <a:rPr lang="hi-IN" sz="700" b="0" kern="1200" dirty="0">
                           <a:solidFill>
                             <a:schemeClr val="dk1"/>
                           </a:solidFill>
                           <a:effectLst/>
-                          <a:latin typeface="+mn-lt"/>
-                          <a:ea typeface="+mn-ea"/>
-                          <a:cs typeface="+mn-cs"/>
                         </a:rPr>
-                        <a:t>अगर ज</a:t>
-                      </a:r>
-                      <a:r>
-                        <a:rPr lang="as-IN" sz="900" b="0" kern="1200" dirty="0">
+                        <a:t>२०११ में कश्यप ने “</a:t>
+                      </a:r>
+                      <a:r>
+                        <a:rPr lang="en-IN" sz="700" b="0" kern="1200" dirty="0">
                           <a:solidFill>
                             <a:srgbClr val="FF0000"/>
                           </a:solidFill>
                           <a:effectLst/>
-                          <a:latin typeface="+mn-lt"/>
-                          <a:ea typeface="+mn-ea"/>
-                          <a:cs typeface="+mn-cs"/>
                         </a:rPr>
-                        <a:t>ল</a:t>
-                      </a:r>
-                      <a:r>
-                        <a:rPr lang="as-IN" sz="900" b="0" kern="1200" dirty="0">
+                        <a:t>Dad Girl in Yellow Boots</a:t>
+                      </a:r>
+                      <a:r>
+                        <a:rPr lang="en-IN" sz="700" b="0" kern="1200" dirty="0">
                           <a:solidFill>
                             <a:schemeClr val="dk1"/>
                           </a:solidFill>
                           <a:effectLst/>
-                          <a:latin typeface="+mn-lt"/>
-                          <a:ea typeface="+mn-ea"/>
-                          <a:cs typeface="+mn-cs"/>
                         </a:rPr>
-                        <a:t> </a:t>
-                      </a:r>
-                      <a:r>
-                        <a:rPr lang="hi-IN" sz="900" b="0" kern="1200" dirty="0">
+                        <a:t>” </a:t>
+                      </a:r>
+                      <a:r>
+                        <a:rPr lang="hi-IN" sz="700" b="0" kern="1200" dirty="0">
                           <a:solidFill>
                             <a:schemeClr val="dk1"/>
                           </a:solidFill>
                           <a:effectLst/>
-                          <a:latin typeface="+mn-lt"/>
-                          <a:ea typeface="+mn-ea"/>
-                          <a:cs typeface="+mn-cs"/>
                         </a:rPr>
-                        <a:t>स्त</a:t>
-                      </a:r>
-                      <a:r>
-                        <a:rPr lang="as-IN" sz="900" b="0" kern="1200" dirty="0">
-                          <a:solidFill>
-                            <a:srgbClr val="FF0000"/>
-                          </a:solidFill>
-                          <a:effectLst/>
-                          <a:latin typeface="+mn-lt"/>
-                          <a:ea typeface="+mn-ea"/>
-                          <a:cs typeface="+mn-cs"/>
-                        </a:rPr>
-                        <a:t>র</a:t>
-                      </a:r>
-                      <a:r>
-                        <a:rPr lang="as-IN" sz="900" b="0" kern="1200" dirty="0">
-                          <a:solidFill>
-                            <a:schemeClr val="dk1"/>
-                          </a:solidFill>
-                          <a:effectLst/>
-                          <a:latin typeface="+mn-lt"/>
-                          <a:ea typeface="+mn-ea"/>
-                          <a:cs typeface="+mn-cs"/>
-                        </a:rPr>
-                        <a:t> </a:t>
-                      </a:r>
-                      <a:r>
-                        <a:rPr lang="hi-IN" sz="900" b="0" kern="1200" dirty="0">
-                          <a:solidFill>
-                            <a:schemeClr val="dk1"/>
-                          </a:solidFill>
-                          <a:effectLst/>
-                          <a:latin typeface="+mn-lt"/>
-                          <a:ea typeface="+mn-ea"/>
-                          <a:cs typeface="+mn-cs"/>
-                        </a:rPr>
-                        <a:t>को लेख बाद एक फिट के लंबाई का वृध्दि हो जाए, तो उनके अभिमानी उम्मीद करते हैं कि नाशित और निर्माण के पुराने वस्था के स्थल पर इस अनुचितता को पुष्तक बनाए जा सकता हूँ।</a:t>
-                      </a:r>
-                    </a:p>
-                    <a:p>
-                      <a:endParaRPr lang="hi-IN" sz="900" b="0" kern="1200" dirty="0">
+                        <a:t>नामक फ़िल्म का निर्देशन किया, जिसमें कल्की कोश्लिन ने प्रदर्शन किया और यह एक थ्रिलर फ़िल्म थी, जिसकी सह‑लेखिका भी वही थी।</a:t>
+                      </a:r>
+                      <a:endParaRPr lang="hi-IN" sz="700" b="0" kern="1200" dirty="0">
                         <a:solidFill>
                           <a:schemeClr val="dk1"/>
                         </a:solidFill>
@@ -4284,14 +3833,7 @@
                       </a:endParaRPr>
                     </a:p>
                   </a:txBody>
-                  <a:tcPr marT="45721" marB="45721">
-                    <a:solidFill>
-                      <a:schemeClr val="accent1">
-                        <a:lumMod val="20000"/>
-                        <a:lumOff val="80000"/>
-                      </a:schemeClr>
-                    </a:solidFill>
-                  </a:tcPr>
+                  <a:tcPr marT="45721" marB="45721"/>
                 </a:tc>
                 <a:tc>
                   <a:txBody>
@@ -4299,26 +3841,151 @@
                     <a:lstStyle/>
                     <a:p>
                       <a:r>
-                        <a:rPr lang="en-US" sz="900" b="0" dirty="0">
-                          <a:latin typeface="+mn-lt"/>
-                          <a:cs typeface="Times New Roman" panose="02020603050405020304" pitchFamily="18" charset="0"/>
-                        </a:rPr>
-                        <a:t>The model hallucinates by introducing script-level corruption and mistranslating key phrases into incorrect, mixed-language, and semantically distorted outputs that change both meaning and grammatical structure of the original sentence.</a:t>
-                      </a:r>
+                        <a:rPr lang="en-US" sz="800" b="0" dirty="0" smtClean="0"/>
+                        <a:t>The model incorrectly changed the script from Devanagari to English letters.</a:t>
+                      </a:r>
+                      <a:endParaRPr lang="en-US" sz="800" b="0" dirty="0">
+                        <a:latin typeface="+mn-lt"/>
+                        <a:cs typeface="Times New Roman" panose="02020603050405020304" pitchFamily="18" charset="0"/>
+                      </a:endParaRPr>
                     </a:p>
                   </a:txBody>
-                  <a:tcPr marT="45721" marB="45721">
-                    <a:solidFill>
-                      <a:schemeClr val="accent1">
-                        <a:lumMod val="20000"/>
-                        <a:lumOff val="80000"/>
-                      </a:schemeClr>
-                    </a:solidFill>
-                  </a:tcPr>
+                  <a:tcPr marT="45721" marB="45721"/>
                 </a:tc>
                 <a:extLst>
                   <a:ext uri="{0D108BD9-81ED-4DB2-BD59-A6C34878D82A}">
-                    <a16:rowId xmlns="" xmlns:a16="http://schemas.microsoft.com/office/drawing/2014/main" val="10005"/>
+                    <a16:rowId xmlns:a16="http://schemas.microsoft.com/office/drawing/2014/main" xmlns="" val="10005"/>
+                  </a:ext>
+                </a:extLst>
+              </a:tr>
+              <a:tr h="499370">
+                <a:tc>
+                  <a:txBody>
+                    <a:bodyPr/>
+                    <a:lstStyle/>
+                    <a:p>
+                      <a:r>
+                        <a:rPr lang="en-GB" sz="700" b="1" dirty="0"/>
+                        <a:t>Tense</a:t>
+                      </a:r>
+                      <a:endParaRPr lang="en-GB" sz="700" b="1" dirty="0">
+                        <a:latin typeface="+mn-lt"/>
+                        <a:cs typeface="Times New Roman" panose="02020603050405020304" pitchFamily="18" charset="0"/>
+                      </a:endParaRPr>
+                    </a:p>
+                  </a:txBody>
+                  <a:tcPr marT="45721" marB="45721"/>
+                </a:tc>
+                <a:tc>
+                  <a:txBody>
+                    <a:bodyPr/>
+                    <a:lstStyle/>
+                    <a:p>
+                      <a:r>
+                        <a:rPr lang="hi-IN" sz="700" b="0" kern="1200" dirty="0">
+                          <a:solidFill>
+                            <a:schemeClr val="dk1"/>
+                          </a:solidFill>
+                          <a:effectLst/>
+                        </a:rPr>
+                        <a:t>केचन रुग्णाः कदाचित् रुग्णालये एव विषाणुना सङ्क्रामिताः सन्ति इति डॉ. मोलमहोदयः मन्यते। तेषु न्यूनातिन्यूनं 2 रुग्णालयस्य सेवाकरौ </a:t>
+                      </a:r>
+                      <a:r>
+                        <a:rPr lang="hi-IN" sz="700" b="0" kern="1200" dirty="0">
+                          <a:solidFill>
+                            <a:srgbClr val="FF0000"/>
+                          </a:solidFill>
+                          <a:effectLst/>
+                        </a:rPr>
+                        <a:t>आस्ताम्</a:t>
+                      </a:r>
+                      <a:r>
+                        <a:rPr lang="hi-IN" sz="700" b="0" kern="1200" dirty="0">
+                          <a:solidFill>
+                            <a:schemeClr val="dk1"/>
+                          </a:solidFill>
+                          <a:effectLst/>
+                        </a:rPr>
+                        <a:t>।</a:t>
+                      </a:r>
+                      <a:endParaRPr lang="hi-IN" sz="700" b="0" kern="1200" dirty="0">
+                        <a:solidFill>
+                          <a:schemeClr val="dk1"/>
+                        </a:solidFill>
+                        <a:effectLst/>
+                        <a:latin typeface="+mn-lt"/>
+                        <a:ea typeface="+mn-ea"/>
+                        <a:cs typeface="+mn-cs"/>
+                      </a:endParaRPr>
+                    </a:p>
+                  </a:txBody>
+                  <a:tcPr marT="45721" marB="45721"/>
+                </a:tc>
+                <a:tc>
+                  <a:txBody>
+                    <a:bodyPr/>
+                    <a:lstStyle/>
+                    <a:p>
+                      <a:r>
+                        <a:rPr lang="hi-IN" sz="700" b="0" kern="1200" dirty="0">
+                          <a:solidFill>
+                            <a:schemeClr val="dk1"/>
+                          </a:solidFill>
+                          <a:effectLst/>
+                        </a:rPr>
+                        <a:t>कुछ रोगी, शायद, अस्पताल में ही वायरस से संक्रमित होते हैं, ऐसा डॉ. मोलमहोदय मानते हैं। उनमें न्यूनतम दो अस्पताल के सेवा कर्मी </a:t>
+                      </a:r>
+                      <a:r>
+                        <a:rPr lang="hi-IN" sz="700" b="0" kern="1200" dirty="0">
+                          <a:solidFill>
+                            <a:srgbClr val="FF0000"/>
+                          </a:solidFill>
+                          <a:effectLst/>
+                        </a:rPr>
+                        <a:t>मौजूद होते हैं</a:t>
+                      </a:r>
+                      <a:r>
+                        <a:rPr lang="hi-IN" sz="700" b="0" kern="1200" dirty="0">
+                          <a:solidFill>
+                            <a:schemeClr val="dk1"/>
+                          </a:solidFill>
+                          <a:effectLst/>
+                        </a:rPr>
+                        <a:t>।</a:t>
+                      </a:r>
+                      <a:endParaRPr lang="hi-IN" sz="700" b="0" kern="1200" dirty="0">
+                        <a:solidFill>
+                          <a:schemeClr val="dk1"/>
+                        </a:solidFill>
+                        <a:effectLst/>
+                        <a:latin typeface="+mn-lt"/>
+                        <a:ea typeface="+mn-ea"/>
+                        <a:cs typeface="+mn-cs"/>
+                      </a:endParaRPr>
+                    </a:p>
+                  </a:txBody>
+                  <a:tcPr marT="45721" marB="45721"/>
+                </a:tc>
+                <a:tc>
+                  <a:txBody>
+                    <a:bodyPr/>
+                    <a:lstStyle/>
+                    <a:p>
+                      <a:r>
+                        <a:rPr lang="en-US" sz="800" b="0" dirty="0" smtClean="0"/>
+                        <a:t>The model changed the past tense o the present tense.</a:t>
+                      </a:r>
+                      <a:endParaRPr lang="en-US" sz="800" b="0" dirty="0">
+                        <a:latin typeface="+mn-lt"/>
+                        <a:cs typeface="Times New Roman" panose="02020603050405020304" pitchFamily="18" charset="0"/>
+                      </a:endParaRPr>
+                    </a:p>
+                  </a:txBody>
+                  <a:tcPr marT="45721" marB="45721"/>
+                </a:tc>
+                <a:extLst>
+                  <a:ext uri="{0D108BD9-81ED-4DB2-BD59-A6C34878D82A}">
+                    <a16:rowId xmlns:a16="http://schemas.microsoft.com/office/drawing/2014/main" xmlns="" val="10007"/>
                   </a:ext>
                 </a:extLst>
               </a:tr>
